--- a/web/downloads/shared/w1/W1.pptx
+++ b/web/downloads/shared/w1/W1.pptx
@@ -3350,7 +3350,7 @@
                 </a:solidFill>
                 <a:latin typeface="Pretendard Black"/>
               </a:rPr>
-              <a:t>Linear vs Cubic 보간 (BB, z=62, k=5)</a:t>
+              <a:t>Linear vs Cubic 보간 (BB, z=62, k=3)</a:t>
             </a:r>
           </a:p>
         </p:txBody>
@@ -3476,16 +3476,55 @@
           </a:p>
         </p:txBody>
       </p:sp>
+      <p:sp>
+        <p:nvSpPr>
+          <p:cNvPr id="7" name="TextBox 6"/>
+          <p:cNvSpPr txBox="1"/>
+          <p:nvPr/>
+        </p:nvSpPr>
+        <p:spPr>
+          <a:xfrm>
+            <a:off x="365760" y="5486400"/>
+            <a:ext cx="11430000" cy="457200"/>
+          </a:xfrm>
+          <a:prstGeom prst="rect">
+            <a:avLst/>
+          </a:prstGeom>
+          <a:noFill/>
+        </p:spPr>
+        <p:txBody>
+          <a:bodyPr wrap="square" lIns="45720" rIns="45720">
+            <a:spAutoFit/>
+          </a:bodyPr>
+          <a:lstStyle/>
+          <a:p>
+            <a:pPr algn="l">
+              <a:lnSpc>
+                <a:spcPct val="115000"/>
+              </a:lnSpc>
+            </a:pPr>
+            <a:r>
+              <a:rPr sz="1400" b="0">
+                <a:solidFill>
+                  <a:srgbClr val="181818"/>
+                </a:solidFill>
+                <a:latin typeface="Pretendard SemiBold"/>
+              </a:rPr>
+              <a:t>평가 지표 2종: |Δφ| (공극률 오차), SSIM (구조 유사도)</a:t>
+            </a:r>
+          </a:p>
+        </p:txBody>
+      </p:sp>
       <p:pic>
         <p:nvPicPr>
-          <p:cNvPr id="6" name="Picture 5" descr="fig4_b1_vs_b2.png"/>
+          <p:cNvPr id="8" name="Picture 7" descr="w1_lincubic_pptx.png"/>
           <p:cNvPicPr>
             <a:picLocks noChangeAspect="1"/>
           </p:cNvPicPr>
           <p:nvPr/>
         </p:nvPicPr>
         <p:blipFill>
-          <a:blip r:embed="rId2"/>
+          <a:blip r:embed="rId3"/>
           <a:stretch>
             <a:fillRect/>
           </a:stretch>
@@ -3500,45 +3539,6 @@
           </a:prstGeom>
         </p:spPr>
       </p:pic>
-      <p:sp>
-        <p:nvSpPr>
-          <p:cNvPr id="7" name="TextBox 6"/>
-          <p:cNvSpPr txBox="1"/>
-          <p:nvPr/>
-        </p:nvSpPr>
-        <p:spPr>
-          <a:xfrm>
-            <a:off x="365760" y="5486400"/>
-            <a:ext cx="11430000" cy="457200"/>
-          </a:xfrm>
-          <a:prstGeom prst="rect">
-            <a:avLst/>
-          </a:prstGeom>
-          <a:noFill/>
-        </p:spPr>
-        <p:txBody>
-          <a:bodyPr wrap="square" lIns="45720" rIns="45720">
-            <a:spAutoFit/>
-          </a:bodyPr>
-          <a:lstStyle/>
-          <a:p>
-            <a:pPr algn="l">
-              <a:lnSpc>
-                <a:spcPct val="115000"/>
-              </a:lnSpc>
-            </a:pPr>
-            <a:r>
-              <a:rPr sz="1400" b="0">
-                <a:solidFill>
-                  <a:srgbClr val="181818"/>
-                </a:solidFill>
-                <a:latin typeface="Pretendard SemiBold"/>
-              </a:rPr>
-              <a:t>평가 지표 3종: |Δφ| (공극률 오차), |ΔSA| (표면적 오차), SSIM (구조 유사도)</a:t>
-            </a:r>
-          </a:p>
-        </p:txBody>
-      </p:sp>
     </p:spTree>
   </p:cSld>
   <p:clrMapOvr>
@@ -3717,16 +3717,94 @@
           </a:p>
         </p:txBody>
       </p:sp>
+      <p:sp>
+        <p:nvSpPr>
+          <p:cNvPr id="7" name="TextBox 6"/>
+          <p:cNvSpPr txBox="1"/>
+          <p:nvPr/>
+        </p:nvSpPr>
+        <p:spPr>
+          <a:xfrm>
+            <a:off x="365760" y="5486400"/>
+            <a:ext cx="11430000" cy="457200"/>
+          </a:xfrm>
+          <a:prstGeom prst="rect">
+            <a:avLst/>
+          </a:prstGeom>
+          <a:noFill/>
+        </p:spPr>
+        <p:txBody>
+          <a:bodyPr wrap="square" lIns="45720" rIns="45720">
+            <a:spAutoFit/>
+          </a:bodyPr>
+          <a:lstStyle/>
+          <a:p>
+            <a:pPr algn="l">
+              <a:lnSpc>
+                <a:spcPct val="115000"/>
+              </a:lnSpc>
+            </a:pPr>
+            <a:r>
+              <a:rPr sz="1400" b="0">
+                <a:solidFill>
+                  <a:srgbClr val="181818"/>
+                </a:solidFill>
+                <a:latin typeface="Pretendard SemiBold"/>
+              </a:rPr>
+              <a:t>k가 커질수록 모든 도메인의 |Δφ|가 증가합니다.</a:t>
+            </a:r>
+          </a:p>
+        </p:txBody>
+      </p:sp>
+      <p:sp>
+        <p:nvSpPr>
+          <p:cNvPr id="8" name="TextBox 7"/>
+          <p:cNvSpPr txBox="1"/>
+          <p:nvPr/>
+        </p:nvSpPr>
+        <p:spPr>
+          <a:xfrm>
+            <a:off x="365760" y="5897880"/>
+            <a:ext cx="11430000" cy="457200"/>
+          </a:xfrm>
+          <a:prstGeom prst="rect">
+            <a:avLst/>
+          </a:prstGeom>
+          <a:noFill/>
+        </p:spPr>
+        <p:txBody>
+          <a:bodyPr wrap="square" lIns="45720" rIns="45720">
+            <a:spAutoFit/>
+          </a:bodyPr>
+          <a:lstStyle/>
+          <a:p>
+            <a:pPr algn="l">
+              <a:lnSpc>
+                <a:spcPct val="115000"/>
+              </a:lnSpc>
+            </a:pPr>
+            <a:r>
+              <a:rPr sz="1300" b="0">
+                <a:solidFill>
+                  <a:srgbClr val="7A7A7A"/>
+                </a:solidFill>
+                <a:latin typeface="Pretendard Medium"/>
+              </a:rPr>
+              <a:t>곡선이 가파르게 꺾이는 지점부터 단순 보간으로는 부족합니다 (W2~ deep learning).</a:t>
+            </a:r>
+          </a:p>
+        </p:txBody>
+      </p:sp>
       <p:pic>
         <p:nvPicPr>
-          <p:cNvPr id="6" name="Picture 5" descr="fig5_motivation.png"/>
+          <p:cNvPr id="9" name="Picture 8" descr="w1_ksweep_pptx.png"/>
           <p:cNvPicPr>
             <a:picLocks noChangeAspect="1"/>
           </p:cNvPicPr>
           <p:nvPr/>
         </p:nvPicPr>
         <p:blipFill>
-          <a:blip r:embed="rId2"/>
+          <a:blip r:embed="rId3"/>
           <a:stretch>
             <a:fillRect/>
           </a:stretch>
@@ -3741,84 +3819,6 @@
           </a:prstGeom>
         </p:spPr>
       </p:pic>
-      <p:sp>
-        <p:nvSpPr>
-          <p:cNvPr id="7" name="TextBox 6"/>
-          <p:cNvSpPr txBox="1"/>
-          <p:nvPr/>
-        </p:nvSpPr>
-        <p:spPr>
-          <a:xfrm>
-            <a:off x="365760" y="5486400"/>
-            <a:ext cx="11430000" cy="457200"/>
-          </a:xfrm>
-          <a:prstGeom prst="rect">
-            <a:avLst/>
-          </a:prstGeom>
-          <a:noFill/>
-        </p:spPr>
-        <p:txBody>
-          <a:bodyPr wrap="square" lIns="45720" rIns="45720">
-            <a:spAutoFit/>
-          </a:bodyPr>
-          <a:lstStyle/>
-          <a:p>
-            <a:pPr algn="l">
-              <a:lnSpc>
-                <a:spcPct val="115000"/>
-              </a:lnSpc>
-            </a:pPr>
-            <a:r>
-              <a:rPr sz="1400" b="0">
-                <a:solidFill>
-                  <a:srgbClr val="181818"/>
-                </a:solidFill>
-                <a:latin typeface="Pretendard SemiBold"/>
-              </a:rPr>
-              <a:t>k가 커질수록 모든 도메인의 |Δφ|가 증가합니다.</a:t>
-            </a:r>
-          </a:p>
-        </p:txBody>
-      </p:sp>
-      <p:sp>
-        <p:nvSpPr>
-          <p:cNvPr id="8" name="TextBox 7"/>
-          <p:cNvSpPr txBox="1"/>
-          <p:nvPr/>
-        </p:nvSpPr>
-        <p:spPr>
-          <a:xfrm>
-            <a:off x="365760" y="5897880"/>
-            <a:ext cx="11430000" cy="457200"/>
-          </a:xfrm>
-          <a:prstGeom prst="rect">
-            <a:avLst/>
-          </a:prstGeom>
-          <a:noFill/>
-        </p:spPr>
-        <p:txBody>
-          <a:bodyPr wrap="square" lIns="45720" rIns="45720">
-            <a:spAutoFit/>
-          </a:bodyPr>
-          <a:lstStyle/>
-          <a:p>
-            <a:pPr algn="l">
-              <a:lnSpc>
-                <a:spcPct val="115000"/>
-              </a:lnSpc>
-            </a:pPr>
-            <a:r>
-              <a:rPr sz="1300" b="0">
-                <a:solidFill>
-                  <a:srgbClr val="7A7A7A"/>
-                </a:solidFill>
-                <a:latin typeface="Pretendard Medium"/>
-              </a:rPr>
-              <a:t>곡선이 가파르게 꺾이는 지점부터 단순 보간으로는 부족합니다 (W2~ deep learning).</a:t>
-            </a:r>
-          </a:p>
-        </p:txBody>
-      </p:sp>
     </p:spTree>
   </p:cSld>
   <p:clrMapOvr>
@@ -4043,7 +4043,7 @@
                 </a:solidFill>
                 <a:latin typeface="Pretendard SemiBold"/>
               </a:rPr>
-              <a:t>필수 1 — 도메인 × {Linear, Cubic} × k=[2,3,5,7] 전수 비교 표 (DataFrame)</a:t>
+              <a:t>필수 1 — 도메인 × {Linear, Cubic} × k=[1,2,3,5,7] 전수 비교 표 (DataFrame)</a:t>
             </a:r>
           </a:p>
           <a:p>
@@ -4127,7 +4127,7 @@
                 </a:solidFill>
                 <a:latin typeface="Pretendard SemiBold"/>
               </a:rPr>
-              <a:t>선택 4 — Random sparse (무작위 33%) vs Deterministic k=3 비교</a:t>
+              <a:t>선택 4 — 이웃 거리 한계 탐색 (k=1~10 |Δφ| 곡선)</a:t>
             </a:r>
           </a:p>
         </p:txBody>
@@ -5852,7 +5852,7 @@
                 </a:solidFill>
                 <a:latin typeface="Pretendard SemiBold"/>
               </a:rPr>
-              <a:t>Sparse imaging 시뮬레이션과 평가 지표 (|Δφ|·|ΔSA|·SSIM)</a:t>
+              <a:t>슬라이스 보간 문제(이웃 거리 k)와 평가 지표 (|Δφ|·SSIM)</a:t>
             </a:r>
           </a:p>
           <a:p>
@@ -7920,7 +7920,7 @@
                 </a:solidFill>
                 <a:latin typeface="Pretendard SemiBold"/>
               </a:rPr>
-              <a:t>k 슬라이스마다 1개만 측정 → 시간 (1 − 1/k) × 100% 절감</a:t>
+              <a:t>이웃 거리 k 로 듬성듬성 측정 → (k+1)배 적게 측정, (1 − 1/(k+1)) 절감</a:t>
             </a:r>
           </a:p>
           <a:p>
@@ -7948,7 +7948,7 @@
                 </a:solidFill>
                 <a:latin typeface="Pretendard SemiBold"/>
               </a:rPr>
-              <a:t>k=3 → 67% 절감, k=5 → 80% 절감</a:t>
+              <a:t>k=3 → 75% 절감, k=5 → 83% 절감</a:t>
             </a:r>
           </a:p>
           <a:p>
@@ -7976,7 +7976,7 @@
                 </a:solidFill>
                 <a:latin typeface="Pretendard SemiBold"/>
               </a:rPr>
-              <a:t>핵심 질문: 측정되지 않은 슬라이스를 측정된 슬라이스로부터 얼마나 정확히 복원할 수 있는가</a:t>
+              <a:t>핵심 질문: 슬라이스 t 를 양옆 이웃 t±k 로 얼마나 정확히 예측할 수 있는가</a:t>
             </a:r>
           </a:p>
         </p:txBody>
